--- a/output/test_single_slide_regen_deck/Python_Scripting_Python.pptx
+++ b/output/test_single_slide_regen_deck/Python_Scripting_Python.pptx
@@ -3122,8 +3122,8 @@
         </p:nvSpPr>
         <p:spPr>
           <a:xfrm>
-            <a:off x="1981199" y="1174750"/>
-            <a:ext cx="8229599" cy="425449"/>
+            <a:off x="1981199" y="1168400"/>
+            <a:ext cx="8229599" cy="438149"/>
           </a:xfrm>
           <a:prstGeom prst="rect">
             <a:avLst/>
@@ -3139,7 +3139,7 @@
             <a:pPr algn="l">
               <a:defRPr sz="4400" b="1">
                 <a:solidFill>
-                  <a:srgbClr val="425C80"/>
+                  <a:srgbClr val="1E2653"/>
                 </a:solidFill>
                 <a:latin typeface="Arial"/>
               </a:defRPr>
@@ -3159,17 +3159,17 @@
         <p:spPr>
           <a:xfrm>
             <a:off x="2235199" y="5454650"/>
-            <a:ext cx="7721599" cy="323849"/>
+            <a:ext cx="7721599" cy="330200"/>
           </a:xfrm>
           <a:prstGeom prst="roundRect">
             <a:avLst/>
           </a:prstGeom>
           <a:solidFill>
-            <a:srgbClr val="6E9AD6"/>
+            <a:srgbClr val="FFFFFF"/>
           </a:solidFill>
           <a:ln w="19050">
             <a:solidFill>
-              <a:srgbClr val="425C80"/>
+              <a:srgbClr val="2563EB"/>
             </a:solidFill>
           </a:ln>
         </p:spPr>
@@ -3194,7 +3194,7 @@
             <a:pPr algn="ctr">
               <a:defRPr sz="3000" b="1">
                 <a:solidFill>
-                  <a:srgbClr val="FFFFFF"/>
+                  <a:srgbClr val="1E2653"/>
                 </a:solidFill>
                 <a:latin typeface="Segoe UI"/>
               </a:defRPr>
@@ -3213,18 +3213,18 @@
         </p:nvSpPr>
         <p:spPr>
           <a:xfrm>
-            <a:off x="2235199" y="1904999"/>
-            <a:ext cx="7721599" cy="558800"/>
+            <a:off x="2235199" y="1911350"/>
+            <a:ext cx="7721599" cy="571500"/>
           </a:xfrm>
           <a:prstGeom prst="roundRect">
             <a:avLst/>
           </a:prstGeom>
           <a:solidFill>
-            <a:srgbClr val="FFFFFF"/>
+            <a:srgbClr val="F8FAFC"/>
           </a:solidFill>
           <a:ln w="12700">
             <a:solidFill>
-              <a:srgbClr val="6E9AD6"/>
+              <a:srgbClr val="E2E8F0"/>
             </a:solidFill>
           </a:ln>
         </p:spPr>
@@ -3252,7 +3252,7 @@
               </a:spcAft>
               <a:defRPr sz="3000">
                 <a:solidFill>
-                  <a:srgbClr val="0F172A"/>
+                  <a:srgbClr val="1E293B"/>
                 </a:solidFill>
                 <a:latin typeface="Segoe UI"/>
               </a:defRPr>
@@ -3268,7 +3268,7 @@
               </a:spcAft>
               <a:defRPr sz="3000">
                 <a:solidFill>
-                  <a:srgbClr val="0F172A"/>
+                  <a:srgbClr val="1E293B"/>
                 </a:solidFill>
                 <a:latin typeface="Segoe UI"/>
               </a:defRPr>
@@ -3329,8 +3329,8 @@
         </p:nvSpPr>
         <p:spPr>
           <a:xfrm>
-            <a:off x="1981199" y="1174750"/>
-            <a:ext cx="8229599" cy="425449"/>
+            <a:off x="1981199" y="1168400"/>
+            <a:ext cx="8229599" cy="438149"/>
           </a:xfrm>
           <a:prstGeom prst="rect">
             <a:avLst/>
@@ -3346,7 +3346,7 @@
             <a:pPr algn="l">
               <a:defRPr sz="4400" b="1">
                 <a:solidFill>
-                  <a:srgbClr val="425C80"/>
+                  <a:srgbClr val="1E2653"/>
                 </a:solidFill>
                 <a:latin typeface="Arial"/>
               </a:defRPr>
@@ -3380,7 +3380,7 @@
           <a:lstStyle/>
           <a:p>
             <a:pPr algn="l">
-              <a:defRPr sz="1300">
+              <a:defRPr sz="1200">
                 <a:solidFill>
                   <a:srgbClr val="64748B"/>
                 </a:solidFill>
@@ -3401,18 +3401,18 @@
         </p:nvSpPr>
         <p:spPr>
           <a:xfrm>
-            <a:off x="1981199" y="1778000"/>
-            <a:ext cx="3994149" cy="838200"/>
+            <a:off x="1981199" y="1784350"/>
+            <a:ext cx="3505199" cy="2159000"/>
           </a:xfrm>
           <a:prstGeom prst="roundRect">
             <a:avLst/>
           </a:prstGeom>
           <a:solidFill>
-            <a:srgbClr val="FFFFFF"/>
+            <a:srgbClr val="F8FAFC"/>
           </a:solidFill>
           <a:ln w="12700">
             <a:solidFill>
-              <a:srgbClr val="6E9AD6"/>
+              <a:srgbClr val="E2E8F0"/>
             </a:solidFill>
           </a:ln>
         </p:spPr>
@@ -3440,7 +3440,7 @@
               </a:spcAft>
               <a:defRPr sz="3000">
                 <a:solidFill>
-                  <a:srgbClr val="0F172A"/>
+                  <a:srgbClr val="1E293B"/>
                 </a:solidFill>
                 <a:latin typeface="Segoe UI"/>
               </a:defRPr>
@@ -3456,7 +3456,7 @@
               </a:spcAft>
               <a:defRPr sz="3000">
                 <a:solidFill>
-                  <a:srgbClr val="0F172A"/>
+                  <a:srgbClr val="1E293B"/>
                 </a:solidFill>
                 <a:latin typeface="Segoe UI"/>
               </a:defRPr>
@@ -3472,7 +3472,7 @@
               </a:spcAft>
               <a:defRPr sz="3000">
                 <a:solidFill>
-                  <a:srgbClr val="0F172A"/>
+                  <a:srgbClr val="1E293B"/>
                 </a:solidFill>
                 <a:latin typeface="Segoe UI"/>
               </a:defRPr>
@@ -3491,18 +3491,18 @@
         </p:nvSpPr>
         <p:spPr>
           <a:xfrm>
-            <a:off x="6216649" y="1778000"/>
-            <a:ext cx="3994149" cy="774700"/>
+            <a:off x="5740399" y="1784350"/>
+            <a:ext cx="4470399" cy="2159000"/>
           </a:xfrm>
           <a:prstGeom prst="roundRect">
             <a:avLst/>
           </a:prstGeom>
           <a:solidFill>
-            <a:srgbClr val="1E1E2E"/>
+            <a:srgbClr val="0F172A"/>
           </a:solidFill>
-          <a:ln w="19050">
+          <a:ln w="12700">
             <a:solidFill>
-              <a:srgbClr val="6E9AD6"/>
+              <a:srgbClr val="1E293B"/>
             </a:solidFill>
           </a:ln>
         </p:spPr>
@@ -3528,9 +3528,9 @@
               <a:spcAft>
                 <a:spcPts val="800"/>
               </a:spcAft>
-              <a:defRPr sz="1300">
+              <a:defRPr sz="1200">
                 <a:solidFill>
-                  <a:srgbClr val="8C9BAF"/>
+                  <a:srgbClr val="60A5FA"/>
                 </a:solidFill>
                 <a:latin typeface="Consolas"/>
               </a:defRPr>
@@ -3631,8 +3631,8 @@
         </p:nvSpPr>
         <p:spPr>
           <a:xfrm>
-            <a:off x="1981199" y="1174750"/>
-            <a:ext cx="8229599" cy="425449"/>
+            <a:off x="1981199" y="1168400"/>
+            <a:ext cx="8229599" cy="438149"/>
           </a:xfrm>
           <a:prstGeom prst="rect">
             <a:avLst/>
@@ -3648,7 +3648,7 @@
             <a:pPr algn="l">
               <a:defRPr sz="4400" b="1">
                 <a:solidFill>
-                  <a:srgbClr val="425C80"/>
+                  <a:srgbClr val="1E2653"/>
                 </a:solidFill>
                 <a:latin typeface="Arial"/>
               </a:defRPr>
@@ -3682,7 +3682,7 @@
           <a:lstStyle/>
           <a:p>
             <a:pPr algn="l">
-              <a:defRPr sz="1300">
+              <a:defRPr sz="1200">
                 <a:solidFill>
                   <a:srgbClr val="64748B"/>
                 </a:solidFill>
@@ -3703,18 +3703,18 @@
         </p:nvSpPr>
         <p:spPr>
           <a:xfrm>
-            <a:off x="2171699" y="1841500"/>
-            <a:ext cx="7848599" cy="622299"/>
+            <a:off x="2171699" y="1847849"/>
+            <a:ext cx="7848599" cy="635000"/>
           </a:xfrm>
           <a:prstGeom prst="roundRect">
             <a:avLst/>
           </a:prstGeom>
           <a:solidFill>
-            <a:srgbClr val="FFFFFF"/>
+            <a:srgbClr val="F8FAFC"/>
           </a:solidFill>
           <a:ln w="12700">
             <a:solidFill>
-              <a:srgbClr val="6E9AD6"/>
+              <a:srgbClr val="E2E8F0"/>
             </a:solidFill>
           </a:ln>
         </p:spPr>
@@ -3742,7 +3742,7 @@
               </a:spcAft>
               <a:defRPr sz="3000">
                 <a:solidFill>
-                  <a:srgbClr val="0F172A"/>
+                  <a:srgbClr val="1E293B"/>
                 </a:solidFill>
                 <a:latin typeface="Segoe UI"/>
               </a:defRPr>
@@ -3758,7 +3758,7 @@
               </a:spcAft>
               <a:defRPr sz="3000">
                 <a:solidFill>
-                  <a:srgbClr val="0F172A"/>
+                  <a:srgbClr val="1E293B"/>
                 </a:solidFill>
                 <a:latin typeface="Segoe UI"/>
               </a:defRPr>

--- a/output/test_single_slide_regen_deck/Python_Scripting_Python.pptx
+++ b/output/test_single_slide_regen_deck/Python_Scripting_Python.pptx
@@ -7,7 +7,7 @@
   <p:sldIdLst>
     <p:sldId id="256" r:id="rId7"/>
     <p:sldId id="257" r:id="rId8"/>
-    <p:sldId id="258" r:id="rId9"/>
+    <p:sldId id="258" r:id="rId10"/>
   </p:sldIdLst>
   <p:sldSz cx="12191999" cy="6858000" type="screen4x3"/>
   <p:notesSz cx="6858000" cy="9144000"/>
@@ -109,6 +109,500 @@
 </p:presentation>
 </file>
 
+<file path=ppt/notesMasters/notesMaster1.xml><?xml version="1.0" encoding="utf-8"?>
+<p:notesMaster xmlns:a="http://schemas.openxmlformats.org/drawingml/2006/main" xmlns:p="http://schemas.openxmlformats.org/presentationml/2006/main" xmlns:r="http://schemas.openxmlformats.org/officeDocument/2006/relationships">
+  <p:cSld>
+    <p:bg>
+      <p:bgRef idx="1001">
+        <a:schemeClr val="bg1"/>
+      </p:bgRef>
+    </p:bg>
+    <p:spTree>
+      <p:nvGrpSpPr>
+        <p:cNvPr id="1" name=""/>
+        <p:cNvGrpSpPr/>
+        <p:nvPr/>
+      </p:nvGrpSpPr>
+      <p:grpSpPr>
+        <a:xfrm>
+          <a:off x="0" y="0"/>
+          <a:ext cx="0" cy="0"/>
+          <a:chOff x="0" y="0"/>
+          <a:chExt cx="0" cy="0"/>
+        </a:xfrm>
+      </p:grpSpPr>
+      <p:sp>
+        <p:nvSpPr>
+          <p:cNvPr id="2" name="Header Placeholder 1"/>
+          <p:cNvSpPr>
+            <a:spLocks noGrp="1"/>
+          </p:cNvSpPr>
+          <p:nvPr>
+            <p:ph type="hdr" sz="quarter"/>
+          </p:nvPr>
+        </p:nvSpPr>
+        <p:spPr>
+          <a:xfrm>
+            <a:off x="0" y="0"/>
+            <a:ext cx="2971800" cy="457200"/>
+          </a:xfrm>
+          <a:prstGeom prst="rect">
+            <a:avLst/>
+          </a:prstGeom>
+        </p:spPr>
+        <p:txBody>
+          <a:bodyPr vert="horz" lIns="91440" tIns="45720" rIns="91440" bIns="45720" rtlCol="0"/>
+          <a:lstStyle>
+            <a:lvl1pPr algn="l">
+              <a:defRPr sz="1200"/>
+            </a:lvl1pPr>
+          </a:lstStyle>
+          <a:p>
+            <a:endParaRPr lang="en-US"/>
+          </a:p>
+        </p:txBody>
+      </p:sp>
+      <p:sp>
+        <p:nvSpPr>
+          <p:cNvPr id="3" name="Date Placeholder 2"/>
+          <p:cNvSpPr>
+            <a:spLocks noGrp="1"/>
+          </p:cNvSpPr>
+          <p:nvPr>
+            <p:ph type="dt" idx="1"/>
+          </p:nvPr>
+        </p:nvSpPr>
+        <p:spPr>
+          <a:xfrm>
+            <a:off x="3884613" y="0"/>
+            <a:ext cx="2971800" cy="457200"/>
+          </a:xfrm>
+          <a:prstGeom prst="rect">
+            <a:avLst/>
+          </a:prstGeom>
+        </p:spPr>
+        <p:txBody>
+          <a:bodyPr vert="horz" lIns="91440" tIns="45720" rIns="91440" bIns="45720" rtlCol="0"/>
+          <a:lstStyle>
+            <a:lvl1pPr algn="r">
+              <a:defRPr sz="1200"/>
+            </a:lvl1pPr>
+          </a:lstStyle>
+          <a:p>
+            <a:fld id="{0F89C1C7-3DCD-1040-A9CF-14679D8B5DDD}" type="datetimeFigureOut">
+              <a:rPr lang="en-US" smtClean="0"/>
+              <a:t>10/17/16</a:t>
+            </a:fld>
+            <a:endParaRPr lang="en-US"/>
+          </a:p>
+        </p:txBody>
+      </p:sp>
+      <p:sp>
+        <p:nvSpPr>
+          <p:cNvPr id="4" name="Slide Image Placeholder 3"/>
+          <p:cNvSpPr>
+            <a:spLocks noGrp="1" noRot="1" noChangeAspect="1"/>
+          </p:cNvSpPr>
+          <p:nvPr>
+            <p:ph type="sldImg" idx="2"/>
+          </p:nvPr>
+        </p:nvSpPr>
+        <p:spPr>
+          <a:xfrm>
+            <a:off x="1143000" y="685800"/>
+            <a:ext cx="4572000" cy="3429000"/>
+          </a:xfrm>
+          <a:prstGeom prst="rect">
+            <a:avLst/>
+          </a:prstGeom>
+          <a:noFill/>
+          <a:ln w="12700">
+            <a:solidFill>
+              <a:prstClr val="black"/>
+            </a:solidFill>
+          </a:ln>
+        </p:spPr>
+        <p:txBody>
+          <a:bodyPr vert="horz" lIns="91440" tIns="45720" rIns="91440" bIns="45720" rtlCol="0" anchor="ctr"/>
+          <a:lstStyle/>
+          <a:p>
+            <a:endParaRPr lang="en-US"/>
+          </a:p>
+        </p:txBody>
+      </p:sp>
+      <p:sp>
+        <p:nvSpPr>
+          <p:cNvPr id="5" name="Notes Placeholder 4"/>
+          <p:cNvSpPr>
+            <a:spLocks noGrp="1"/>
+          </p:cNvSpPr>
+          <p:nvPr>
+            <p:ph type="body" sz="quarter" idx="3"/>
+          </p:nvPr>
+        </p:nvSpPr>
+        <p:spPr>
+          <a:xfrm>
+            <a:off x="685800" y="4343400"/>
+            <a:ext cx="5486400" cy="4114800"/>
+          </a:xfrm>
+          <a:prstGeom prst="rect">
+            <a:avLst/>
+          </a:prstGeom>
+        </p:spPr>
+        <p:txBody>
+          <a:bodyPr vert="horz" lIns="91440" tIns="45720" rIns="91440" bIns="45720" rtlCol="0"/>
+          <a:lstStyle/>
+          <a:p>
+            <a:pPr lvl="0"/>
+            <a:r>
+              <a:rPr lang="en-US" smtClean="0"/>
+              <a:t>Click to edit Master text styles</a:t>
+            </a:r>
+          </a:p>
+          <a:p>
+            <a:pPr lvl="1"/>
+            <a:r>
+              <a:rPr lang="en-US" smtClean="0"/>
+              <a:t>Second level</a:t>
+            </a:r>
+          </a:p>
+          <a:p>
+            <a:pPr lvl="2"/>
+            <a:r>
+              <a:rPr lang="en-US" smtClean="0"/>
+              <a:t>Third level</a:t>
+            </a:r>
+          </a:p>
+          <a:p>
+            <a:pPr lvl="3"/>
+            <a:r>
+              <a:rPr lang="en-US" smtClean="0"/>
+              <a:t>Fourth level</a:t>
+            </a:r>
+          </a:p>
+          <a:p>
+            <a:pPr lvl="4"/>
+            <a:r>
+              <a:rPr lang="en-US" smtClean="0"/>
+              <a:t>Fifth level</a:t>
+            </a:r>
+            <a:endParaRPr lang="en-US"/>
+          </a:p>
+        </p:txBody>
+      </p:sp>
+      <p:sp>
+        <p:nvSpPr>
+          <p:cNvPr id="6" name="Footer Placeholder 5"/>
+          <p:cNvSpPr>
+            <a:spLocks noGrp="1"/>
+          </p:cNvSpPr>
+          <p:nvPr>
+            <p:ph type="ftr" sz="quarter" idx="4"/>
+          </p:nvPr>
+        </p:nvSpPr>
+        <p:spPr>
+          <a:xfrm>
+            <a:off x="0" y="8685213"/>
+            <a:ext cx="2971800" cy="457200"/>
+          </a:xfrm>
+          <a:prstGeom prst="rect">
+            <a:avLst/>
+          </a:prstGeom>
+        </p:spPr>
+        <p:txBody>
+          <a:bodyPr vert="horz" lIns="91440" tIns="45720" rIns="91440" bIns="45720" rtlCol="0" anchor="b"/>
+          <a:lstStyle>
+            <a:lvl1pPr algn="l">
+              <a:defRPr sz="1200"/>
+            </a:lvl1pPr>
+          </a:lstStyle>
+          <a:p>
+            <a:endParaRPr lang="en-US"/>
+          </a:p>
+        </p:txBody>
+      </p:sp>
+      <p:sp>
+        <p:nvSpPr>
+          <p:cNvPr id="7" name="Slide Number Placeholder 6"/>
+          <p:cNvSpPr>
+            <a:spLocks noGrp="1"/>
+          </p:cNvSpPr>
+          <p:nvPr>
+            <p:ph type="sldNum" sz="quarter" idx="5"/>
+          </p:nvPr>
+        </p:nvSpPr>
+        <p:spPr>
+          <a:xfrm>
+            <a:off x="3884613" y="8685213"/>
+            <a:ext cx="2971800" cy="457200"/>
+          </a:xfrm>
+          <a:prstGeom prst="rect">
+            <a:avLst/>
+          </a:prstGeom>
+        </p:spPr>
+        <p:txBody>
+          <a:bodyPr vert="horz" lIns="91440" tIns="45720" rIns="91440" bIns="45720" rtlCol="0" anchor="b"/>
+          <a:lstStyle>
+            <a:lvl1pPr algn="r">
+              <a:defRPr sz="1200"/>
+            </a:lvl1pPr>
+          </a:lstStyle>
+          <a:p>
+            <a:fld id="{BB5E49A5-4136-284D-997B-48E1D791AD67}" type="slidenum">
+              <a:rPr lang="en-US" smtClean="0"/>
+              <a:t>‹#›</a:t>
+            </a:fld>
+            <a:endParaRPr lang="en-US"/>
+          </a:p>
+        </p:txBody>
+      </p:sp>
+    </p:spTree>
+    <p:extLst>
+      <p:ext uri="{BB962C8B-B14F-4D97-AF65-F5344CB8AC3E}">
+        <p14:creationId xmlns:p14="http://schemas.microsoft.com/office/powerpoint/2010/main" val="2623252185"/>
+      </p:ext>
+    </p:extLst>
+  </p:cSld>
+  <p:clrMap bg1="lt1" tx1="dk1" bg2="lt2" tx2="dk2" accent1="accent1" accent2="accent2" accent3="accent3" accent4="accent4" accent5="accent5" accent6="accent6" hlink="hlink" folHlink="folHlink"/>
+  <p:notesStyle>
+    <a:lvl1pPr marL="0" algn="l" defTabSz="457200" rtl="0" eaLnBrk="1" latinLnBrk="0" hangingPunct="1">
+      <a:defRPr sz="1200" kern="1200">
+        <a:solidFill>
+          <a:schemeClr val="tx1"/>
+        </a:solidFill>
+        <a:latin typeface="+mn-lt"/>
+        <a:ea typeface="+mn-ea"/>
+        <a:cs typeface="+mn-cs"/>
+      </a:defRPr>
+    </a:lvl1pPr>
+    <a:lvl2pPr marL="457200" algn="l" defTabSz="457200" rtl="0" eaLnBrk="1" latinLnBrk="0" hangingPunct="1">
+      <a:defRPr sz="1200" kern="1200">
+        <a:solidFill>
+          <a:schemeClr val="tx1"/>
+        </a:solidFill>
+        <a:latin typeface="+mn-lt"/>
+        <a:ea typeface="+mn-ea"/>
+        <a:cs typeface="+mn-cs"/>
+      </a:defRPr>
+    </a:lvl2pPr>
+    <a:lvl3pPr marL="914400" algn="l" defTabSz="457200" rtl="0" eaLnBrk="1" latinLnBrk="0" hangingPunct="1">
+      <a:defRPr sz="1200" kern="1200">
+        <a:solidFill>
+          <a:schemeClr val="tx1"/>
+        </a:solidFill>
+        <a:latin typeface="+mn-lt"/>
+        <a:ea typeface="+mn-ea"/>
+        <a:cs typeface="+mn-cs"/>
+      </a:defRPr>
+    </a:lvl3pPr>
+    <a:lvl4pPr marL="1371600" algn="l" defTabSz="457200" rtl="0" eaLnBrk="1" latinLnBrk="0" hangingPunct="1">
+      <a:defRPr sz="1200" kern="1200">
+        <a:solidFill>
+          <a:schemeClr val="tx1"/>
+        </a:solidFill>
+        <a:latin typeface="+mn-lt"/>
+        <a:ea typeface="+mn-ea"/>
+        <a:cs typeface="+mn-cs"/>
+      </a:defRPr>
+    </a:lvl4pPr>
+    <a:lvl5pPr marL="1828800" algn="l" defTabSz="457200" rtl="0" eaLnBrk="1" latinLnBrk="0" hangingPunct="1">
+      <a:defRPr sz="1200" kern="1200">
+        <a:solidFill>
+          <a:schemeClr val="tx1"/>
+        </a:solidFill>
+        <a:latin typeface="+mn-lt"/>
+        <a:ea typeface="+mn-ea"/>
+        <a:cs typeface="+mn-cs"/>
+      </a:defRPr>
+    </a:lvl5pPr>
+    <a:lvl6pPr marL="2286000" algn="l" defTabSz="457200" rtl="0" eaLnBrk="1" latinLnBrk="0" hangingPunct="1">
+      <a:defRPr sz="1200" kern="1200">
+        <a:solidFill>
+          <a:schemeClr val="tx1"/>
+        </a:solidFill>
+        <a:latin typeface="+mn-lt"/>
+        <a:ea typeface="+mn-ea"/>
+        <a:cs typeface="+mn-cs"/>
+      </a:defRPr>
+    </a:lvl6pPr>
+    <a:lvl7pPr marL="2743200" algn="l" defTabSz="457200" rtl="0" eaLnBrk="1" latinLnBrk="0" hangingPunct="1">
+      <a:defRPr sz="1200" kern="1200">
+        <a:solidFill>
+          <a:schemeClr val="tx1"/>
+        </a:solidFill>
+        <a:latin typeface="+mn-lt"/>
+        <a:ea typeface="+mn-ea"/>
+        <a:cs typeface="+mn-cs"/>
+      </a:defRPr>
+    </a:lvl7pPr>
+    <a:lvl8pPr marL="3200400" algn="l" defTabSz="457200" rtl="0" eaLnBrk="1" latinLnBrk="0" hangingPunct="1">
+      <a:defRPr sz="1200" kern="1200">
+        <a:solidFill>
+          <a:schemeClr val="tx1"/>
+        </a:solidFill>
+        <a:latin typeface="+mn-lt"/>
+        <a:ea typeface="+mn-ea"/>
+        <a:cs typeface="+mn-cs"/>
+      </a:defRPr>
+    </a:lvl8pPr>
+    <a:lvl9pPr marL="3657600" algn="l" defTabSz="457200" rtl="0" eaLnBrk="1" latinLnBrk="0" hangingPunct="1">
+      <a:defRPr sz="1200" kern="1200">
+        <a:solidFill>
+          <a:schemeClr val="tx1"/>
+        </a:solidFill>
+        <a:latin typeface="+mn-lt"/>
+        <a:ea typeface="+mn-ea"/>
+        <a:cs typeface="+mn-cs"/>
+      </a:defRPr>
+    </a:lvl9pPr>
+  </p:notesStyle>
+</p:notesMaster>
+</file>
+
+<file path=ppt/notesSlides/notesSlide1.xml><?xml version="1.0" encoding="utf-8"?>
+<p:notes xmlns:a="http://schemas.openxmlformats.org/drawingml/2006/main" xmlns:p="http://schemas.openxmlformats.org/presentationml/2006/main" xmlns:r="http://schemas.openxmlformats.org/officeDocument/2006/relationships">
+  <p:cSld>
+    <p:spTree>
+      <p:nvGrpSpPr>
+        <p:cNvPr id="1" name=""/>
+        <p:cNvGrpSpPr/>
+        <p:nvPr/>
+      </p:nvGrpSpPr>
+      <p:grpSpPr>
+        <a:xfrm>
+          <a:off x="0" y="0"/>
+          <a:ext cx="0" cy="0"/>
+          <a:chOff x="0" y="0"/>
+          <a:chExt cx="0" cy="0"/>
+        </a:xfrm>
+      </p:grpSpPr>
+      <p:sp>
+        <p:nvSpPr>
+          <p:cNvPr id="2" name="Slide Image Placeholder 1"/>
+          <p:cNvSpPr>
+            <a:spLocks noGrp="1"/>
+          </p:cNvSpPr>
+          <p:nvPr>
+            <p:ph type="sldImg" idx="2"/>
+          </p:nvPr>
+        </p:nvSpPr>
+        <p:spPr/>
+      </p:sp>
+      <p:sp>
+        <p:nvSpPr>
+          <p:cNvPr id="3" name="Notes Placeholder 2"/>
+          <p:cNvSpPr>
+            <a:spLocks noGrp="1"/>
+          </p:cNvSpPr>
+          <p:nvPr>
+            <p:ph type="body" idx="3" sz="quarter"/>
+          </p:nvPr>
+        </p:nvSpPr>
+        <p:spPr/>
+        <p:txBody>
+          <a:bodyPr/>
+          <a:lstStyle/>
+          <a:p>
+            <a:r>
+              <a:t>Trainer Notes:</a:t>
+            </a:r>
+          </a:p>
+          <a:p>
+            <a:r>
+              <a:t>Complete Runnable File (ex_python_s2_slide_2):</a:t>
+            </a:r>
+          </a:p>
+          <a:p>
+            <a:r>
+              <a:t>```python</a:t>
+            </a:r>
+          </a:p>
+          <a:p>
+            <a:r>
+              <a:t>import sys</a:t>
+            </a:r>
+          </a:p>
+          <a:p>
+            <a:r>
+              <a:t>import asyncio</a:t>
+            </a:r>
+          </a:p>
+          <a:p/>
+          <a:p>
+            <a:r>
+              <a:t>async def demonstrate_concept():</a:t>
+            </a:r>
+          </a:p>
+          <a:p>
+            <a:r>
+              <a:t>    # Concept: Slide 2</a:t>
+            </a:r>
+          </a:p>
+          <a:p>
+            <a:r>
+              <a:t>    message = "Slide 2 Executed in Python 3.12"</a:t>
+            </a:r>
+          </a:p>
+          <a:p>
+            <a:r>
+              <a:t>    print(message)</a:t>
+            </a:r>
+          </a:p>
+          <a:p>
+            <a:r>
+              <a:t>    return message</a:t>
+            </a:r>
+          </a:p>
+          <a:p/>
+          <a:p>
+            <a:r>
+              <a:t>def main():</a:t>
+            </a:r>
+          </a:p>
+          <a:p>
+            <a:r>
+              <a:t>    asyncio.run(demonstrate_concept())</a:t>
+            </a:r>
+          </a:p>
+          <a:p/>
+          <a:p>
+            <a:r>
+              <a:t>if __name__ == '__main__':</a:t>
+            </a:r>
+          </a:p>
+          <a:p>
+            <a:r>
+              <a:t>    main()</a:t>
+            </a:r>
+          </a:p>
+          <a:p/>
+          <a:p>
+            <a:r>
+              <a:t>```</a:t>
+            </a:r>
+          </a:p>
+        </p:txBody>
+      </p:sp>
+      <p:sp>
+        <p:nvSpPr>
+          <p:cNvPr id="4" name="Slide Number Placeholder 3"/>
+          <p:cNvSpPr>
+            <a:spLocks noGrp="1"/>
+          </p:cNvSpPr>
+          <p:nvPr>
+            <p:ph type="sldNum" idx="5" sz="quarter"/>
+          </p:nvPr>
+        </p:nvSpPr>
+        <p:spPr/>
+      </p:sp>
+    </p:spTree>
+  </p:cSld>
+  <p:clrMapOvr>
+    <a:masterClrMapping/>
+  </p:clrMapOvr>
+</p:notes>
+</file>
+
 <file path=ppt/slideLayouts/slideLayout1.xml><?xml version="1.0" encoding="utf-8"?>
 <p:sldLayout xmlns:a="http://schemas.openxmlformats.org/drawingml/2006/main" xmlns:r="http://schemas.openxmlformats.org/officeDocument/2006/relationships" xmlns:p="http://schemas.openxmlformats.org/presentationml/2006/main" type="title" preserve="1">
   <p:cSld name="Title Slide">
@@ -138,8 +632,8 @@
         </p:nvSpPr>
         <p:spPr>
           <a:xfrm>
-            <a:off x="685800" y="2130425"/>
-            <a:ext cx="7772400" cy="1470025"/>
+            <a:off x="1371600" y="1828800"/>
+            <a:ext cx="9445752" cy="1645920"/>
           </a:xfrm>
         </p:spPr>
         <p:txBody>
@@ -166,8 +660,8 @@
         </p:nvSpPr>
         <p:spPr>
           <a:xfrm>
-            <a:off x="1371600" y="3886200"/>
-            <a:ext cx="6400800" cy="1752600"/>
+            <a:off x="1371600" y="3840480"/>
+            <a:ext cx="9445752" cy="1097280"/>
           </a:xfrm>
         </p:spPr>
         <p:txBody>
@@ -306,7 +800,12 @@
             <p:ph type="ftr" sz="quarter" idx="11"/>
           </p:nvPr>
         </p:nvSpPr>
-        <p:spPr/>
+        <p:spPr>
+          <a:xfrm>
+            <a:off x="1371600" y="6217920"/>
+            <a:ext cx="8229600" cy="320040"/>
+          </a:xfrm>
+        </p:spPr>
         <p:txBody>
           <a:bodyPr/>
           <a:lstStyle/>
@@ -728,7 +1227,12 @@
             <p:ph type="title"/>
           </p:nvPr>
         </p:nvSpPr>
-        <p:spPr/>
+        <p:spPr>
+          <a:xfrm>
+            <a:off x="1371600" y="950976"/>
+            <a:ext cx="9445752" cy="640080"/>
+          </a:xfrm>
+        </p:spPr>
         <p:txBody>
           <a:bodyPr/>
           <a:lstStyle/>
@@ -751,7 +1255,12 @@
             <p:ph idx="1"/>
           </p:nvPr>
         </p:nvSpPr>
-        <p:spPr/>
+        <p:spPr>
+          <a:xfrm>
+            <a:off x="1371600" y="1709928"/>
+            <a:ext cx="9445752" cy="4297680"/>
+          </a:xfrm>
+        </p:spPr>
         <p:txBody>
           <a:bodyPr/>
           <a:lstStyle/>
@@ -826,7 +1335,12 @@
             <p:ph type="ftr" sz="quarter" idx="11"/>
           </p:nvPr>
         </p:nvSpPr>
-        <p:spPr/>
+        <p:spPr>
+          <a:xfrm>
+            <a:off x="1371600" y="6217920"/>
+            <a:ext cx="8229600" cy="320040"/>
+          </a:xfrm>
+        </p:spPr>
         <p:txBody>
           <a:bodyPr/>
           <a:lstStyle/>
@@ -845,7 +1359,12 @@
             <p:ph type="sldNum" sz="quarter" idx="12"/>
           </p:nvPr>
         </p:nvSpPr>
-        <p:spPr/>
+        <p:spPr>
+          <a:xfrm>
+            <a:off x="10058400" y="6217920"/>
+            <a:ext cx="914400" cy="320040"/>
+          </a:xfrm>
+        </p:spPr>
         <p:txBody>
           <a:bodyPr/>
           <a:lstStyle/>
@@ -1144,7 +1663,12 @@
             <p:ph type="title"/>
           </p:nvPr>
         </p:nvSpPr>
-        <p:spPr/>
+        <p:spPr>
+          <a:xfrm>
+            <a:off x="1371600" y="950976"/>
+            <a:ext cx="9445752" cy="640080"/>
+          </a:xfrm>
+        </p:spPr>
         <p:txBody>
           <a:bodyPr/>
           <a:lstStyle/>
@@ -1169,8 +1693,8 @@
         </p:nvSpPr>
         <p:spPr>
           <a:xfrm>
-            <a:off x="457200" y="1600200"/>
-            <a:ext cx="4038600" cy="4525963"/>
+            <a:off x="1371600" y="1709928"/>
+            <a:ext cx="4572000" cy="4297680"/>
           </a:xfrm>
         </p:spPr>
         <p:txBody>
@@ -1254,8 +1778,8 @@
         </p:nvSpPr>
         <p:spPr>
           <a:xfrm>
-            <a:off x="4648200" y="1600200"/>
-            <a:ext cx="4038600" cy="4525963"/>
+            <a:off x="6217920" y="1709928"/>
+            <a:ext cx="4572000" cy="4297680"/>
           </a:xfrm>
         </p:spPr>
         <p:txBody>
@@ -1360,7 +1884,12 @@
             <p:ph type="ftr" sz="quarter" idx="11"/>
           </p:nvPr>
         </p:nvSpPr>
-        <p:spPr/>
+        <p:spPr>
+          <a:xfrm>
+            <a:off x="1371600" y="6217920"/>
+            <a:ext cx="8229600" cy="320040"/>
+          </a:xfrm>
+        </p:spPr>
         <p:txBody>
           <a:bodyPr/>
           <a:lstStyle/>
@@ -1379,7 +1908,12 @@
             <p:ph type="sldNum" sz="quarter" idx="12"/>
           </p:nvPr>
         </p:nvSpPr>
-        <p:spPr/>
+        <p:spPr>
+          <a:xfrm>
+            <a:off x="10058400" y="6217920"/>
+            <a:ext cx="914400" cy="320040"/>
+          </a:xfrm>
+        </p:spPr>
         <p:txBody>
           <a:bodyPr/>
           <a:lstStyle/>
@@ -3092,7 +3626,7 @@
       <p:grpSpPr/>
       <p:pic>
         <p:nvPicPr>
-          <p:cNvPr id="2" name="Picture 1" descr="VIT_background.png"/>
+          <p:cNvPr id="4" name="Picture 3" descr="VIT_background.png"/>
           <p:cNvPicPr>
             <a:picLocks noChangeAspect="1"/>
           </p:cNvPicPr>
@@ -3116,14 +3650,119 @@
       </p:pic>
       <p:sp>
         <p:nvSpPr>
-          <p:cNvPr id="3" name="TextBox 2"/>
+          <p:cNvPr id="2" name="Title 1"/>
+          <p:cNvSpPr>
+            <a:spLocks noGrp="1"/>
+          </p:cNvSpPr>
+          <p:nvPr>
+            <p:ph type="ctrTitle"/>
+          </p:nvPr>
+        </p:nvSpPr>
+        <p:spPr>
+          <a:xfrm>
+            <a:off x="1981199" y="1168400"/>
+            <a:ext cx="8229599" cy="438149"/>
+          </a:xfrm>
+        </p:spPr>
+        <p:txBody>
+          <a:bodyPr wrap="square"/>
+          <a:lstStyle/>
+          <a:p>
+            <a:pPr algn="l">
+              <a:defRPr sz="4400" b="1">
+                <a:solidFill>
+                  <a:srgbClr val="1E2653"/>
+                </a:solidFill>
+                <a:latin typeface="Arial"/>
+              </a:defRPr>
+            </a:pPr>
+            <a:r>
+              <a:t>Slide 1</a:t>
+            </a:r>
+          </a:p>
+        </p:txBody>
+      </p:sp>
+      <p:sp>
+        <p:nvSpPr>
+          <p:cNvPr id="3" name="Subtitle 2"/>
+          <p:cNvSpPr>
+            <a:spLocks noGrp="1"/>
+          </p:cNvSpPr>
+          <p:nvPr>
+            <p:ph type="subTitle" idx="1"/>
+          </p:nvPr>
+        </p:nvSpPr>
+        <p:spPr>
+          <a:xfrm>
+            <a:off x="2235199" y="5454650"/>
+            <a:ext cx="7721599" cy="330200"/>
+          </a:xfrm>
+        </p:spPr>
+        <p:txBody>
+          <a:bodyPr wrap="square"/>
+          <a:lstStyle/>
+          <a:p>
+            <a:pPr algn="l">
+              <a:defRPr sz="3000" b="1">
+                <a:solidFill>
+                  <a:srgbClr val="2563EB"/>
+                </a:solidFill>
+                <a:latin typeface="Segoe UI"/>
+              </a:defRPr>
+            </a:pPr>
+            <a:r>
+              <a:t>Presented By Prof. Test</a:t>
+            </a:r>
+          </a:p>
+          <a:p>
+            <a:pPr algn="l">
+              <a:defRPr sz="1600">
+                <a:solidFill>
+                  <a:srgbClr val="64748B"/>
+                </a:solidFill>
+                <a:latin typeface="Segoe UI"/>
+              </a:defRPr>
+            </a:pPr>
+            <a:r>
+              <a:t>VIT Course Material</a:t>
+            </a:r>
+          </a:p>
+        </p:txBody>
+      </p:sp>
+      <p:pic>
+        <p:nvPicPr>
+          <p:cNvPr id="5" name="Picture 4" descr="dpu_logo.png"/>
+          <p:cNvPicPr>
+            <a:picLocks noChangeAspect="1"/>
+          </p:cNvPicPr>
+          <p:nvPr/>
+        </p:nvPicPr>
+        <p:blipFill>
+          <a:blip r:embed="rId3"/>
+          <a:stretch>
+            <a:fillRect/>
+          </a:stretch>
+        </p:blipFill>
+        <p:spPr>
+          <a:xfrm>
+            <a:off x="365760" y="182880"/>
+            <a:ext cx="2926080" cy="731520"/>
+          </a:xfrm>
+          <a:prstGeom prst="rect">
+            <a:avLst/>
+          </a:prstGeom>
+        </p:spPr>
+      </p:pic>
+      <p:sp>
+        <p:nvSpPr>
+          <p:cNvPr id="6" name="Footer Placeholder"/>
           <p:cNvSpPr txBox="1"/>
           <p:nvPr/>
         </p:nvSpPr>
         <p:spPr>
           <a:xfrm>
-            <a:off x="1981199" y="1168400"/>
-            <a:ext cx="8229599" cy="438149"/>
+            <a:off x="1981199" y="5994400"/>
+            <a:ext cx="8229599" cy="285750"/>
           </a:xfrm>
           <a:prstGeom prst="rect">
             <a:avLst/>
@@ -3131,150 +3770,21 @@
           <a:noFill/>
         </p:spPr>
         <p:txBody>
-          <a:bodyPr wrap="square" anchor="ctr">
+          <a:bodyPr wrap="square">
             <a:spAutoFit/>
           </a:bodyPr>
           <a:lstStyle/>
           <a:p>
             <a:pPr algn="l">
-              <a:defRPr sz="4400" b="1">
-                <a:solidFill>
-                  <a:srgbClr val="1E2653"/>
-                </a:solidFill>
-                <a:latin typeface="Arial"/>
-              </a:defRPr>
-            </a:pPr>
-            <a:r>
-              <a:t>Slide 1</a:t>
-            </a:r>
-          </a:p>
-        </p:txBody>
-      </p:sp>
-      <p:sp>
-        <p:nvSpPr>
-          <p:cNvPr id="4" name="Rounded Rectangle 3"/>
-          <p:cNvSpPr/>
-          <p:nvPr/>
-        </p:nvSpPr>
-        <p:spPr>
-          <a:xfrm>
-            <a:off x="2235199" y="5454650"/>
-            <a:ext cx="7721599" cy="330200"/>
-          </a:xfrm>
-          <a:prstGeom prst="roundRect">
-            <a:avLst/>
-          </a:prstGeom>
-          <a:solidFill>
-            <a:srgbClr val="FFFFFF"/>
-          </a:solidFill>
-          <a:ln w="19050">
-            <a:solidFill>
-              <a:srgbClr val="2563EB"/>
-            </a:solidFill>
-          </a:ln>
-        </p:spPr>
-        <p:style>
-          <a:lnRef idx="1">
-            <a:schemeClr val="accent1"/>
-          </a:lnRef>
-          <a:fillRef idx="3">
-            <a:schemeClr val="accent1"/>
-          </a:fillRef>
-          <a:effectRef idx="2">
-            <a:schemeClr val="accent1"/>
-          </a:effectRef>
-          <a:fontRef idx="minor">
-            <a:schemeClr val="lt1"/>
-          </a:fontRef>
-        </p:style>
-        <p:txBody>
-          <a:bodyPr rtlCol="0" anchor="ctr" wrap="square"/>
-          <a:lstStyle/>
-          <a:p>
-            <a:pPr algn="ctr">
-              <a:defRPr sz="3000" b="1">
-                <a:solidFill>
-                  <a:srgbClr val="1E2653"/>
+              <a:defRPr sz="1100">
+                <a:solidFill>
+                  <a:srgbClr val="64748B"/>
                 </a:solidFill>
                 <a:latin typeface="Segoe UI"/>
               </a:defRPr>
             </a:pPr>
             <a:r>
-              <a:t>Presented By Prof. Test</a:t>
-            </a:r>
-          </a:p>
-        </p:txBody>
-      </p:sp>
-      <p:sp>
-        <p:nvSpPr>
-          <p:cNvPr id="5" name="Rounded Rectangle 4"/>
-          <p:cNvSpPr/>
-          <p:nvPr/>
-        </p:nvSpPr>
-        <p:spPr>
-          <a:xfrm>
-            <a:off x="2235199" y="1911350"/>
-            <a:ext cx="7721599" cy="571500"/>
-          </a:xfrm>
-          <a:prstGeom prst="roundRect">
-            <a:avLst/>
-          </a:prstGeom>
-          <a:solidFill>
-            <a:srgbClr val="F8FAFC"/>
-          </a:solidFill>
-          <a:ln w="12700">
-            <a:solidFill>
-              <a:srgbClr val="E2E8F0"/>
-            </a:solidFill>
-          </a:ln>
-        </p:spPr>
-        <p:style>
-          <a:lnRef idx="1">
-            <a:schemeClr val="accent1"/>
-          </a:lnRef>
-          <a:fillRef idx="3">
-            <a:schemeClr val="accent1"/>
-          </a:fillRef>
-          <a:effectRef idx="2">
-            <a:schemeClr val="accent1"/>
-          </a:effectRef>
-          <a:fontRef idx="minor">
-            <a:schemeClr val="lt1"/>
-          </a:fontRef>
-        </p:style>
-        <p:txBody>
-          <a:bodyPr rtlCol="0" anchor="t" wrap="square"/>
-          <a:lstStyle/>
-          <a:p>
-            <a:pPr algn="l">
-              <a:spcAft>
-                <a:spcPts val="1200"/>
-              </a:spcAft>
-              <a:defRPr sz="3000">
-                <a:solidFill>
-                  <a:srgbClr val="1E293B"/>
-                </a:solidFill>
-                <a:latin typeface="Segoe UI"/>
-              </a:defRPr>
-            </a:pPr>
-            <a:r>
-              <a:t>•  A</a:t>
-            </a:r>
-          </a:p>
-          <a:p>
-            <a:pPr algn="l">
-              <a:spcAft>
-                <a:spcPts val="1200"/>
-              </a:spcAft>
-              <a:defRPr sz="3000">
-                <a:solidFill>
-                  <a:srgbClr val="1E293B"/>
-                </a:solidFill>
-                <a:latin typeface="Segoe UI"/>
-              </a:defRPr>
-            </a:pPr>
-            <a:r>
-              <a:t>•  B</a:t>
+              <a:t>VIT   •   Slide 1</a:t>
             </a:r>
           </a:p>
         </p:txBody>
@@ -3299,7 +3809,7 @@
       <p:grpSpPr/>
       <p:pic>
         <p:nvPicPr>
-          <p:cNvPr id="2" name="Picture 1" descr="VIT_background.png"/>
+          <p:cNvPr id="5" name="Picture 4" descr="VIT_background.png"/>
           <p:cNvPicPr>
             <a:picLocks noChangeAspect="1"/>
           </p:cNvPicPr>
@@ -3323,96 +3833,173 @@
       </p:pic>
       <p:sp>
         <p:nvSpPr>
-          <p:cNvPr id="3" name="TextBox 2"/>
-          <p:cNvSpPr txBox="1"/>
-          <p:nvPr/>
+          <p:cNvPr id="2" name="Title 1"/>
+          <p:cNvSpPr>
+            <a:spLocks noGrp="1"/>
+          </p:cNvSpPr>
+          <p:nvPr>
+            <p:ph type="title"/>
+          </p:nvPr>
         </p:nvSpPr>
         <p:spPr>
           <a:xfrm>
             <a:off x="1981199" y="1168400"/>
             <a:ext cx="8229599" cy="438149"/>
+          </a:xfrm>
+        </p:spPr>
+        <p:txBody>
+          <a:bodyPr wrap="square"/>
+          <a:lstStyle/>
+          <a:p>
+            <a:pPr algn="l">
+              <a:defRPr sz="4400" b="1">
+                <a:solidFill>
+                  <a:srgbClr val="1E2653"/>
+                </a:solidFill>
+                <a:latin typeface="Arial"/>
+              </a:defRPr>
+            </a:pPr>
+            <a:r>
+              <a:t>Slide 2</a:t>
+            </a:r>
+          </a:p>
+        </p:txBody>
+      </p:sp>
+      <p:sp>
+        <p:nvSpPr>
+          <p:cNvPr id="3" name="Content Placeholder 2"/>
+          <p:cNvSpPr>
+            <a:spLocks noGrp="1"/>
+          </p:cNvSpPr>
+          <p:nvPr>
+            <p:ph idx="1" sz="half"/>
+          </p:nvPr>
+        </p:nvSpPr>
+        <p:spPr>
+          <a:xfrm>
+            <a:off x="1981199" y="1784350"/>
+            <a:ext cx="3505199" cy="2159000"/>
+          </a:xfrm>
+        </p:spPr>
+        <p:txBody>
+          <a:bodyPr wrap="square" anchor="t"/>
+          <a:lstStyle/>
+          <a:p>
+            <a:pPr algn="l">
+              <a:spcAft>
+                <a:spcPts val="1000"/>
+              </a:spcAft>
+              <a:defRPr sz="3000">
+                <a:solidFill>
+                  <a:srgbClr val="1E293B"/>
+                </a:solidFill>
+                <a:latin typeface="Segoe UI"/>
+              </a:defRPr>
+            </a:pPr>
+            <a:r>
+              <a:t>•  Refined: Include timing calculation</a:t>
+            </a:r>
+          </a:p>
+          <a:p>
+            <a:pPr algn="l">
+              <a:spcAft>
+                <a:spcPts val="1000"/>
+              </a:spcAft>
+              <a:defRPr sz="3000">
+                <a:solidFill>
+                  <a:srgbClr val="1E293B"/>
+                </a:solidFill>
+                <a:latin typeface="Segoe UI"/>
+              </a:defRPr>
+            </a:pPr>
+            <a:r>
+              <a:t>•  C</a:t>
+            </a:r>
+          </a:p>
+          <a:p>
+            <a:pPr algn="l">
+              <a:spcAft>
+                <a:spcPts val="1000"/>
+              </a:spcAft>
+              <a:defRPr sz="3000">
+                <a:solidFill>
+                  <a:srgbClr val="1E293B"/>
+                </a:solidFill>
+                <a:latin typeface="Segoe UI"/>
+              </a:defRPr>
+            </a:pPr>
+            <a:r>
+              <a:t>•  D</a:t>
+            </a:r>
+          </a:p>
+        </p:txBody>
+      </p:sp>
+      <p:sp>
+        <p:nvSpPr>
+          <p:cNvPr id="4" name="Content Placeholder 3"/>
+          <p:cNvSpPr>
+            <a:spLocks noGrp="1"/>
+          </p:cNvSpPr>
+          <p:nvPr>
+            <p:ph idx="2" sz="half"/>
+          </p:nvPr>
+        </p:nvSpPr>
+        <p:spPr>
+          <a:xfrm>
+            <a:off x="5740399" y="1784350"/>
+            <a:ext cx="4470399" cy="2159000"/>
+          </a:xfrm>
+        </p:spPr>
+        <p:txBody>
+          <a:bodyPr/>
+          <a:lstStyle/>
+          <a:p/>
+        </p:txBody>
+      </p:sp>
+      <p:pic>
+        <p:nvPicPr>
+          <p:cNvPr id="6" name="Picture 5" descr="dpu_logo.png"/>
+          <p:cNvPicPr>
+            <a:picLocks noChangeAspect="1"/>
+          </p:cNvPicPr>
+          <p:nvPr/>
+        </p:nvPicPr>
+        <p:blipFill>
+          <a:blip r:embed="rId3"/>
+          <a:stretch>
+            <a:fillRect/>
+          </a:stretch>
+        </p:blipFill>
+        <p:spPr>
+          <a:xfrm>
+            <a:off x="365760" y="182880"/>
+            <a:ext cx="2926080" cy="731520"/>
           </a:xfrm>
           <a:prstGeom prst="rect">
             <a:avLst/>
           </a:prstGeom>
-          <a:noFill/>
-        </p:spPr>
-        <p:txBody>
-          <a:bodyPr wrap="square" anchor="ctr">
-            <a:spAutoFit/>
-          </a:bodyPr>
-          <a:lstStyle/>
-          <a:p>
-            <a:pPr algn="l">
-              <a:defRPr sz="4400" b="1">
-                <a:solidFill>
-                  <a:srgbClr val="1E2653"/>
-                </a:solidFill>
-                <a:latin typeface="Arial"/>
-              </a:defRPr>
-            </a:pPr>
-            <a:r>
-              <a:t>Slide 2</a:t>
-            </a:r>
-          </a:p>
-        </p:txBody>
-      </p:sp>
-      <p:sp>
-        <p:nvSpPr>
-          <p:cNvPr id="4" name="TextBox 3"/>
-          <p:cNvSpPr txBox="1"/>
-          <p:nvPr/>
-        </p:nvSpPr>
-        <p:spPr>
-          <a:xfrm>
-            <a:off x="1981199" y="5994400"/>
-            <a:ext cx="8229599" cy="152400"/>
-          </a:xfrm>
-          <a:prstGeom prst="rect">
-            <a:avLst/>
-          </a:prstGeom>
-          <a:noFill/>
-        </p:spPr>
-        <p:txBody>
-          <a:bodyPr wrap="square">
-            <a:spAutoFit/>
-          </a:bodyPr>
-          <a:lstStyle/>
-          <a:p>
-            <a:pPr algn="l">
-              <a:defRPr sz="1200">
-                <a:solidFill>
-                  <a:srgbClr val="64748B"/>
-                </a:solidFill>
-                <a:latin typeface="Segoe UI"/>
-              </a:defRPr>
-            </a:pPr>
-            <a:r>
-              <a:t>VIT   •   Slide 2   •   Slide 2</a:t>
-            </a:r>
-          </a:p>
-        </p:txBody>
-      </p:sp>
-      <p:sp>
-        <p:nvSpPr>
-          <p:cNvPr id="5" name="Rounded Rectangle 4"/>
+        </p:spPr>
+      </p:pic>
+      <p:sp>
+        <p:nvSpPr>
+          <p:cNvPr id="7" name="Rounded Rectangle 6"/>
           <p:cNvSpPr/>
           <p:nvPr/>
         </p:nvSpPr>
         <p:spPr>
           <a:xfrm>
-            <a:off x="1981199" y="1784350"/>
-            <a:ext cx="3505199" cy="2159000"/>
+            <a:off x="5740399" y="1784350"/>
+            <a:ext cx="4470399" cy="2159000"/>
           </a:xfrm>
           <a:prstGeom prst="roundRect">
             <a:avLst/>
           </a:prstGeom>
           <a:solidFill>
-            <a:srgbClr val="F8FAFC"/>
+            <a:srgbClr val="0F172A"/>
           </a:solidFill>
-          <a:ln w="12700">
+          <a:ln w="19050">
             <a:solidFill>
-              <a:srgbClr val="E2E8F0"/>
+              <a:srgbClr val="2563EB"/>
             </a:solidFill>
           </a:ln>
         </p:spPr>
@@ -3431,104 +4018,14 @@
           </a:fontRef>
         </p:style>
         <p:txBody>
-          <a:bodyPr rtlCol="0" anchor="t" wrap="square"/>
-          <a:lstStyle/>
-          <a:p>
-            <a:pPr algn="l">
-              <a:spcAft>
-                <a:spcPts val="1200"/>
-              </a:spcAft>
-              <a:defRPr sz="3000">
-                <a:solidFill>
-                  <a:srgbClr val="1E293B"/>
-                </a:solidFill>
-                <a:latin typeface="Segoe UI"/>
-              </a:defRPr>
-            </a:pPr>
-            <a:r>
-              <a:t>•  Refined: Include timing calculation</a:t>
-            </a:r>
-          </a:p>
-          <a:p>
-            <a:pPr algn="l">
-              <a:spcAft>
-                <a:spcPts val="1200"/>
-              </a:spcAft>
-              <a:defRPr sz="3000">
-                <a:solidFill>
-                  <a:srgbClr val="1E293B"/>
-                </a:solidFill>
-                <a:latin typeface="Segoe UI"/>
-              </a:defRPr>
-            </a:pPr>
-            <a:r>
-              <a:t>•  C</a:t>
-            </a:r>
-          </a:p>
-          <a:p>
-            <a:pPr algn="l">
-              <a:spcAft>
-                <a:spcPts val="1200"/>
-              </a:spcAft>
-              <a:defRPr sz="3000">
-                <a:solidFill>
-                  <a:srgbClr val="1E293B"/>
-                </a:solidFill>
-                <a:latin typeface="Segoe UI"/>
-              </a:defRPr>
-            </a:pPr>
-            <a:r>
-              <a:t>•  D</a:t>
-            </a:r>
-          </a:p>
-        </p:txBody>
-      </p:sp>
-      <p:sp>
-        <p:nvSpPr>
-          <p:cNvPr id="6" name="Rounded Rectangle 5"/>
-          <p:cNvSpPr/>
-          <p:nvPr/>
-        </p:nvSpPr>
-        <p:spPr>
-          <a:xfrm>
-            <a:off x="5740399" y="1784350"/>
-            <a:ext cx="4470399" cy="2159000"/>
-          </a:xfrm>
-          <a:prstGeom prst="roundRect">
-            <a:avLst/>
-          </a:prstGeom>
-          <a:solidFill>
-            <a:srgbClr val="0F172A"/>
-          </a:solidFill>
-          <a:ln w="12700">
-            <a:solidFill>
-              <a:srgbClr val="1E293B"/>
-            </a:solidFill>
-          </a:ln>
-        </p:spPr>
-        <p:style>
-          <a:lnRef idx="1">
-            <a:schemeClr val="accent1"/>
-          </a:lnRef>
-          <a:fillRef idx="3">
-            <a:schemeClr val="accent1"/>
-          </a:fillRef>
-          <a:effectRef idx="2">
-            <a:schemeClr val="accent1"/>
-          </a:effectRef>
-          <a:fontRef idx="minor">
-            <a:schemeClr val="lt1"/>
-          </a:fontRef>
-        </p:style>
-        <p:txBody>
-          <a:bodyPr rtlCol="0" anchor="t" wrap="square"/>
+          <a:bodyPr rtlCol="0" anchor="t" wrap="none"/>
           <a:lstStyle/>
           <a:p>
             <a:pPr algn="ctr">
               <a:spcAft>
-                <a:spcPts val="800"/>
+                <a:spcPts val="600"/>
               </a:spcAft>
-              <a:defRPr sz="1200">
+              <a:defRPr sz="1400">
                 <a:solidFill>
                   <a:srgbClr val="60A5FA"/>
                 </a:solidFill>
@@ -3536,7 +4033,7 @@
               </a:defRPr>
             </a:pPr>
             <a:r>
-              <a:t>// Language: PLAINTEXT</a:t>
+              <a:t>// PYTHON 3.12.8</a:t>
             </a:r>
           </a:p>
           <a:p>
@@ -3544,19 +4041,18 @@
               <a:spcAft>
                 <a:spcPts val="200"/>
               </a:spcAft>
-              <a:defRPr sz="2000">
+              <a:defRPr sz="1400">
                 <a:latin typeface="Consolas"/>
               </a:defRPr>
             </a:pPr>
             <a:r>
-              <a:rPr sz="2000">
-                <a:solidFill>
-                  <a:srgbClr val="F0F4FA"/>
+              <a:rPr sz="1400">
+                <a:solidFill>
+                  <a:srgbClr val="788291"/>
                 </a:solidFill>
                 <a:latin typeface="Consolas"/>
               </a:rPr>
-              <a:t># Updated: Include timing calculation
-</a:t>
+              <a:t># Concept: Slide 2</a:t>
             </a:r>
           </a:p>
           <a:p>
@@ -3564,19 +4060,273 @@
               <a:spcAft>
                 <a:spcPts val="200"/>
               </a:spcAft>
-              <a:defRPr sz="2000">
+              <a:defRPr sz="1400">
                 <a:latin typeface="Consolas"/>
               </a:defRPr>
             </a:pPr>
             <a:r>
-              <a:rPr sz="2000">
+              <a:rPr sz="1400">
                 <a:solidFill>
                   <a:srgbClr val="F0F4FA"/>
                 </a:solidFill>
                 <a:latin typeface="Consolas"/>
               </a:rPr>
-              <a:t>print('Original')
-</a:t>
+              <a:t>message</a:t>
+            </a:r>
+            <a:r>
+              <a:rPr sz="1400">
+                <a:solidFill>
+                  <a:srgbClr val="F0F4FA"/>
+                </a:solidFill>
+                <a:latin typeface="Consolas"/>
+              </a:rPr>
+              <a:t> </a:t>
+            </a:r>
+            <a:r>
+              <a:rPr sz="1400">
+                <a:solidFill>
+                  <a:srgbClr val="56B6C2"/>
+                </a:solidFill>
+                <a:latin typeface="Consolas"/>
+              </a:rPr>
+              <a:t>=</a:t>
+            </a:r>
+            <a:r>
+              <a:rPr sz="1400">
+                <a:solidFill>
+                  <a:srgbClr val="F0F4FA"/>
+                </a:solidFill>
+                <a:latin typeface="Consolas"/>
+              </a:rPr>
+              <a:t> </a:t>
+            </a:r>
+            <a:r>
+              <a:rPr sz="1400">
+                <a:solidFill>
+                  <a:srgbClr val="98C379"/>
+                </a:solidFill>
+                <a:latin typeface="Consolas"/>
+              </a:rPr>
+              <a:t>"</a:t>
+            </a:r>
+            <a:r>
+              <a:rPr sz="1400">
+                <a:solidFill>
+                  <a:srgbClr val="98C379"/>
+                </a:solidFill>
+                <a:latin typeface="Consolas"/>
+              </a:rPr>
+              <a:t>Slide 2 Executed in Python 3.12</a:t>
+            </a:r>
+            <a:r>
+              <a:rPr sz="1400">
+                <a:solidFill>
+                  <a:srgbClr val="98C379"/>
+                </a:solidFill>
+                <a:latin typeface="Consolas"/>
+              </a:rPr>
+              <a:t>"</a:t>
+            </a:r>
+          </a:p>
+          <a:p>
+            <a:pPr>
+              <a:spcAft>
+                <a:spcPts val="200"/>
+              </a:spcAft>
+              <a:defRPr sz="1400">
+                <a:latin typeface="Consolas"/>
+              </a:defRPr>
+            </a:pPr>
+            <a:r>
+              <a:rPr sz="1400">
+                <a:solidFill>
+                  <a:srgbClr val="E5C07B"/>
+                </a:solidFill>
+                <a:latin typeface="Consolas"/>
+              </a:rPr>
+              <a:t>print</a:t>
+            </a:r>
+            <a:r>
+              <a:rPr sz="1400">
+                <a:solidFill>
+                  <a:srgbClr val="ABB2BF"/>
+                </a:solidFill>
+                <a:latin typeface="Consolas"/>
+              </a:rPr>
+              <a:t>(</a:t>
+            </a:r>
+            <a:r>
+              <a:rPr sz="1400">
+                <a:solidFill>
+                  <a:srgbClr val="F0F4FA"/>
+                </a:solidFill>
+                <a:latin typeface="Consolas"/>
+              </a:rPr>
+              <a:t>message</a:t>
+            </a:r>
+            <a:r>
+              <a:rPr sz="1400">
+                <a:solidFill>
+                  <a:srgbClr val="ABB2BF"/>
+                </a:solidFill>
+                <a:latin typeface="Consolas"/>
+              </a:rPr>
+              <a:t>)</a:t>
+            </a:r>
+          </a:p>
+          <a:p>
+            <a:pPr>
+              <a:spcAft>
+                <a:spcPts val="200"/>
+              </a:spcAft>
+              <a:defRPr sz="1400">
+                <a:latin typeface="Consolas"/>
+              </a:defRPr>
+            </a:pPr>
+            <a:r>
+              <a:rPr sz="1400">
+                <a:solidFill>
+                  <a:srgbClr val="C678DD"/>
+                </a:solidFill>
+                <a:latin typeface="Consolas"/>
+              </a:rPr>
+              <a:t>return</a:t>
+            </a:r>
+            <a:r>
+              <a:rPr sz="1400">
+                <a:solidFill>
+                  <a:srgbClr val="F0F4FA"/>
+                </a:solidFill>
+                <a:latin typeface="Consolas"/>
+              </a:rPr>
+              <a:t> </a:t>
+            </a:r>
+            <a:r>
+              <a:rPr sz="1400">
+                <a:solidFill>
+                  <a:srgbClr val="F0F4FA"/>
+                </a:solidFill>
+                <a:latin typeface="Consolas"/>
+              </a:rPr>
+              <a:t>message</a:t>
+            </a:r>
+          </a:p>
+          <a:p>
+            <a:pPr>
+              <a:spcAft>
+                <a:spcPts val="200"/>
+              </a:spcAft>
+              <a:defRPr sz="1400">
+                <a:latin typeface="Consolas"/>
+              </a:defRPr>
+            </a:pPr>
+            <a:r>
+              <a:rPr sz="1400">
+                <a:solidFill>
+                  <a:srgbClr val="F0F4FA"/>
+                </a:solidFill>
+                <a:latin typeface="Consolas"/>
+              </a:rPr>
+              <a:t>asyncio</a:t>
+            </a:r>
+            <a:r>
+              <a:rPr sz="1400">
+                <a:solidFill>
+                  <a:srgbClr val="56B6C2"/>
+                </a:solidFill>
+                <a:latin typeface="Consolas"/>
+              </a:rPr>
+              <a:t>.</a:t>
+            </a:r>
+            <a:r>
+              <a:rPr sz="1400">
+                <a:solidFill>
+                  <a:srgbClr val="F0F4FA"/>
+                </a:solidFill>
+                <a:latin typeface="Consolas"/>
+              </a:rPr>
+              <a:t>run</a:t>
+            </a:r>
+            <a:r>
+              <a:rPr sz="1400">
+                <a:solidFill>
+                  <a:srgbClr val="ABB2BF"/>
+                </a:solidFill>
+                <a:latin typeface="Consolas"/>
+              </a:rPr>
+              <a:t>(</a:t>
+            </a:r>
+            <a:r>
+              <a:rPr sz="1400">
+                <a:solidFill>
+                  <a:srgbClr val="F0F4FA"/>
+                </a:solidFill>
+                <a:latin typeface="Consolas"/>
+              </a:rPr>
+              <a:t>demonstrate_concept</a:t>
+            </a:r>
+            <a:r>
+              <a:rPr sz="1400">
+                <a:solidFill>
+                  <a:srgbClr val="ABB2BF"/>
+                </a:solidFill>
+                <a:latin typeface="Consolas"/>
+              </a:rPr>
+              <a:t>(</a:t>
+            </a:r>
+            <a:r>
+              <a:rPr sz="1400">
+                <a:solidFill>
+                  <a:srgbClr val="ABB2BF"/>
+                </a:solidFill>
+                <a:latin typeface="Consolas"/>
+              </a:rPr>
+              <a:t>)</a:t>
+            </a:r>
+            <a:r>
+              <a:rPr sz="1400">
+                <a:solidFill>
+                  <a:srgbClr val="ABB2BF"/>
+                </a:solidFill>
+                <a:latin typeface="Consolas"/>
+              </a:rPr>
+              <a:t>)</a:t>
+            </a:r>
+          </a:p>
+        </p:txBody>
+      </p:sp>
+      <p:sp>
+        <p:nvSpPr>
+          <p:cNvPr id="8" name="Footer Placeholder"/>
+          <p:cNvSpPr txBox="1"/>
+          <p:nvPr/>
+        </p:nvSpPr>
+        <p:spPr>
+          <a:xfrm>
+            <a:off x="1981199" y="5994400"/>
+            <a:ext cx="8229599" cy="152400"/>
+          </a:xfrm>
+          <a:prstGeom prst="rect">
+            <a:avLst/>
+          </a:prstGeom>
+          <a:noFill/>
+        </p:spPr>
+        <p:txBody>
+          <a:bodyPr wrap="square">
+            <a:spAutoFit/>
+          </a:bodyPr>
+          <a:lstStyle/>
+          <a:p>
+            <a:pPr algn="l">
+              <a:defRPr sz="1100">
+                <a:solidFill>
+                  <a:srgbClr val="64748B"/>
+                </a:solidFill>
+                <a:latin typeface="Segoe UI"/>
+              </a:defRPr>
+            </a:pPr>
+            <a:r>
+              <a:t>VIT   •   Slide 2</a:t>
             </a:r>
           </a:p>
         </p:txBody>
@@ -3601,7 +4351,7 @@
       <p:grpSpPr/>
       <p:pic>
         <p:nvPicPr>
-          <p:cNvPr id="2" name="Picture 1" descr="VIT_background.png"/>
+          <p:cNvPr id="4" name="Picture 3" descr="VIT_background.png"/>
           <p:cNvPicPr>
             <a:picLocks noChangeAspect="1"/>
           </p:cNvPicPr>
@@ -3625,14 +4375,125 @@
       </p:pic>
       <p:sp>
         <p:nvSpPr>
-          <p:cNvPr id="3" name="TextBox 2"/>
+          <p:cNvPr id="2" name="Title 1"/>
+          <p:cNvSpPr>
+            <a:spLocks noGrp="1"/>
+          </p:cNvSpPr>
+          <p:nvPr>
+            <p:ph type="title"/>
+          </p:nvPr>
+        </p:nvSpPr>
+        <p:spPr>
+          <a:xfrm>
+            <a:off x="1981199" y="1168400"/>
+            <a:ext cx="8229599" cy="438149"/>
+          </a:xfrm>
+        </p:spPr>
+        <p:txBody>
+          <a:bodyPr wrap="square"/>
+          <a:lstStyle/>
+          <a:p>
+            <a:pPr algn="l">
+              <a:defRPr sz="4400" b="1">
+                <a:solidFill>
+                  <a:srgbClr val="1E2653"/>
+                </a:solidFill>
+                <a:latin typeface="Arial"/>
+              </a:defRPr>
+            </a:pPr>
+            <a:r>
+              <a:t>Slide 3</a:t>
+            </a:r>
+          </a:p>
+        </p:txBody>
+      </p:sp>
+      <p:sp>
+        <p:nvSpPr>
+          <p:cNvPr id="3" name="Content Placeholder 2"/>
+          <p:cNvSpPr>
+            <a:spLocks noGrp="1"/>
+          </p:cNvSpPr>
+          <p:nvPr>
+            <p:ph idx="1"/>
+          </p:nvPr>
+        </p:nvSpPr>
+        <p:spPr>
+          <a:xfrm>
+            <a:off x="2171699" y="1847849"/>
+            <a:ext cx="7848599" cy="635000"/>
+          </a:xfrm>
+        </p:spPr>
+        <p:txBody>
+          <a:bodyPr wrap="square" anchor="t"/>
+          <a:lstStyle/>
+          <a:p>
+            <a:pPr algn="l">
+              <a:spcAft>
+                <a:spcPts val="1000"/>
+              </a:spcAft>
+              <a:defRPr sz="3000">
+                <a:solidFill>
+                  <a:srgbClr val="1E293B"/>
+                </a:solidFill>
+                <a:latin typeface="Segoe UI"/>
+              </a:defRPr>
+            </a:pPr>
+            <a:r>
+              <a:t>•  E</a:t>
+            </a:r>
+          </a:p>
+          <a:p>
+            <a:pPr algn="l">
+              <a:spcAft>
+                <a:spcPts val="1000"/>
+              </a:spcAft>
+              <a:defRPr sz="3000">
+                <a:solidFill>
+                  <a:srgbClr val="1E293B"/>
+                </a:solidFill>
+                <a:latin typeface="Segoe UI"/>
+              </a:defRPr>
+            </a:pPr>
+            <a:r>
+              <a:t>•  F</a:t>
+            </a:r>
+          </a:p>
+        </p:txBody>
+      </p:sp>
+      <p:pic>
+        <p:nvPicPr>
+          <p:cNvPr id="5" name="Picture 4" descr="dpu_logo.png"/>
+          <p:cNvPicPr>
+            <a:picLocks noChangeAspect="1"/>
+          </p:cNvPicPr>
+          <p:nvPr/>
+        </p:nvPicPr>
+        <p:blipFill>
+          <a:blip r:embed="rId3"/>
+          <a:stretch>
+            <a:fillRect/>
+          </a:stretch>
+        </p:blipFill>
+        <p:spPr>
+          <a:xfrm>
+            <a:off x="365760" y="182880"/>
+            <a:ext cx="2926080" cy="731520"/>
+          </a:xfrm>
+          <a:prstGeom prst="rect">
+            <a:avLst/>
+          </a:prstGeom>
+        </p:spPr>
+      </p:pic>
+      <p:sp>
+        <p:nvSpPr>
+          <p:cNvPr id="6" name="Footer Placeholder"/>
           <p:cNvSpPr txBox="1"/>
           <p:nvPr/>
         </p:nvSpPr>
         <p:spPr>
           <a:xfrm>
-            <a:off x="1981199" y="1168400"/>
-            <a:ext cx="8229599" cy="438149"/>
+            <a:off x="1981199" y="5994400"/>
+            <a:ext cx="8229599" cy="152400"/>
           </a:xfrm>
           <a:prstGeom prst="rect">
             <a:avLst/>
@@ -3640,49 +4501,13 @@
           <a:noFill/>
         </p:spPr>
         <p:txBody>
-          <a:bodyPr wrap="square" anchor="ctr">
-            <a:spAutoFit/>
-          </a:bodyPr>
-          <a:lstStyle/>
-          <a:p>
-            <a:pPr algn="l">
-              <a:defRPr sz="4400" b="1">
-                <a:solidFill>
-                  <a:srgbClr val="1E2653"/>
-                </a:solidFill>
-                <a:latin typeface="Arial"/>
-              </a:defRPr>
-            </a:pPr>
-            <a:r>
-              <a:t>Slide 3</a:t>
-            </a:r>
-          </a:p>
-        </p:txBody>
-      </p:sp>
-      <p:sp>
-        <p:nvSpPr>
-          <p:cNvPr id="4" name="TextBox 3"/>
-          <p:cNvSpPr txBox="1"/>
-          <p:nvPr/>
-        </p:nvSpPr>
-        <p:spPr>
-          <a:xfrm>
-            <a:off x="1981199" y="5994400"/>
-            <a:ext cx="8229599" cy="152400"/>
-          </a:xfrm>
-          <a:prstGeom prst="rect">
-            <a:avLst/>
-          </a:prstGeom>
-          <a:noFill/>
-        </p:spPr>
-        <p:txBody>
           <a:bodyPr wrap="square">
             <a:spAutoFit/>
           </a:bodyPr>
           <a:lstStyle/>
           <a:p>
             <a:pPr algn="l">
-              <a:defRPr sz="1200">
+              <a:defRPr sz="1100">
                 <a:solidFill>
                   <a:srgbClr val="64748B"/>
                 </a:solidFill>
@@ -3690,81 +4515,7 @@
               </a:defRPr>
             </a:pPr>
             <a:r>
-              <a:t>VIT   •   Slide 3   •   Slide 3</a:t>
-            </a:r>
-          </a:p>
-        </p:txBody>
-      </p:sp>
-      <p:sp>
-        <p:nvSpPr>
-          <p:cNvPr id="5" name="Rounded Rectangle 4"/>
-          <p:cNvSpPr/>
-          <p:nvPr/>
-        </p:nvSpPr>
-        <p:spPr>
-          <a:xfrm>
-            <a:off x="2171699" y="1847849"/>
-            <a:ext cx="7848599" cy="635000"/>
-          </a:xfrm>
-          <a:prstGeom prst="roundRect">
-            <a:avLst/>
-          </a:prstGeom>
-          <a:solidFill>
-            <a:srgbClr val="F8FAFC"/>
-          </a:solidFill>
-          <a:ln w="12700">
-            <a:solidFill>
-              <a:srgbClr val="E2E8F0"/>
-            </a:solidFill>
-          </a:ln>
-        </p:spPr>
-        <p:style>
-          <a:lnRef idx="1">
-            <a:schemeClr val="accent1"/>
-          </a:lnRef>
-          <a:fillRef idx="3">
-            <a:schemeClr val="accent1"/>
-          </a:fillRef>
-          <a:effectRef idx="2">
-            <a:schemeClr val="accent1"/>
-          </a:effectRef>
-          <a:fontRef idx="minor">
-            <a:schemeClr val="lt1"/>
-          </a:fontRef>
-        </p:style>
-        <p:txBody>
-          <a:bodyPr rtlCol="0" anchor="t" wrap="square"/>
-          <a:lstStyle/>
-          <a:p>
-            <a:pPr algn="l">
-              <a:spcAft>
-                <a:spcPts val="1200"/>
-              </a:spcAft>
-              <a:defRPr sz="3000">
-                <a:solidFill>
-                  <a:srgbClr val="1E293B"/>
-                </a:solidFill>
-                <a:latin typeface="Segoe UI"/>
-              </a:defRPr>
-            </a:pPr>
-            <a:r>
-              <a:t>•  E</a:t>
-            </a:r>
-          </a:p>
-          <a:p>
-            <a:pPr algn="l">
-              <a:spcAft>
-                <a:spcPts val="1200"/>
-              </a:spcAft>
-              <a:defRPr sz="3000">
-                <a:solidFill>
-                  <a:srgbClr val="1E293B"/>
-                </a:solidFill>
-                <a:latin typeface="Segoe UI"/>
-              </a:defRPr>
-            </a:pPr>
-            <a:r>
-              <a:t>•  F</a:t>
+              <a:t>VIT   •   Slide 3</a:t>
             </a:r>
           </a:p>
         </p:txBody>
@@ -4095,4 +4846,324 @@
   </a:objectDefaults>
   <a:extraClrSchemeLst/>
 </a:theme>
+</file>
+
+<file path=ppt/theme/theme2.xml><?xml version="1.0" encoding="utf-8"?>
+<a:theme xmlns:a="http://schemas.openxmlformats.org/drawingml/2006/main" name="Office Theme">
+  <a:themeElements>
+    <a:clrScheme name="Office">
+      <a:dk1>
+        <a:sysClr val="windowText" lastClr="000000"/>
+      </a:dk1>
+      <a:lt1>
+        <a:sysClr val="window" lastClr="FFFFFF"/>
+      </a:lt1>
+      <a:dk2>
+        <a:srgbClr val="1F497D"/>
+      </a:dk2>
+      <a:lt2>
+        <a:srgbClr val="EEECE1"/>
+      </a:lt2>
+      <a:accent1>
+        <a:srgbClr val="4F81BD"/>
+      </a:accent1>
+      <a:accent2>
+        <a:srgbClr val="C0504D"/>
+      </a:accent2>
+      <a:accent3>
+        <a:srgbClr val="9BBB59"/>
+      </a:accent3>
+      <a:accent4>
+        <a:srgbClr val="8064A2"/>
+      </a:accent4>
+      <a:accent5>
+        <a:srgbClr val="4BACC6"/>
+      </a:accent5>
+      <a:accent6>
+        <a:srgbClr val="F79646"/>
+      </a:accent6>
+      <a:hlink>
+        <a:srgbClr val="0000FF"/>
+      </a:hlink>
+      <a:folHlink>
+        <a:srgbClr val="800080"/>
+      </a:folHlink>
+    </a:clrScheme>
+    <a:fontScheme name="Office">
+      <a:majorFont>
+        <a:latin typeface="Calibri"/>
+        <a:ea typeface=""/>
+        <a:cs typeface=""/>
+        <a:font script="Jpan" typeface="ＭＳ Ｐゴシック"/>
+        <a:font script="Hang" typeface="맑은 고딕"/>
+        <a:font script="Hans" typeface="宋体"/>
+        <a:font script="Hant" typeface="新細明體"/>
+        <a:font script="Arab" typeface="Times New Roman"/>
+        <a:font script="Hebr" typeface="Times New Roman"/>
+        <a:font script="Thai" typeface="Angsana New"/>
+        <a:font script="Ethi" typeface="Nyala"/>
+        <a:font script="Beng" typeface="Vrinda"/>
+        <a:font script="Gujr" typeface="Shruti"/>
+        <a:font script="Khmr" typeface="MoolBoran"/>
+        <a:font script="Knda" typeface="Tunga"/>
+        <a:font script="Guru" typeface="Raavi"/>
+        <a:font script="Cans" typeface="Euphemia"/>
+        <a:font script="Cher" typeface="Plantagenet Cherokee"/>
+        <a:font script="Yiii" typeface="Microsoft Yi Baiti"/>
+        <a:font script="Tibt" typeface="Microsoft Himalaya"/>
+        <a:font script="Thaa" typeface="MV Boli"/>
+        <a:font script="Deva" typeface="Mangal"/>
+        <a:font script="Telu" typeface="Gautami"/>
+        <a:font script="Taml" typeface="Latha"/>
+        <a:font script="Syrc" typeface="Estrangelo Edessa"/>
+        <a:font script="Orya" typeface="Kalinga"/>
+        <a:font script="Mlym" typeface="Kartika"/>
+        <a:font script="Laoo" typeface="DokChampa"/>
+        <a:font script="Sinh" typeface="Iskoola Pota"/>
+        <a:font script="Mong" typeface="Mongolian Baiti"/>
+        <a:font script="Viet" typeface="Times New Roman"/>
+        <a:font script="Uigh" typeface="Microsoft Uighur"/>
+        <a:font script="Geor" typeface="Sylfaen"/>
+      </a:majorFont>
+      <a:minorFont>
+        <a:latin typeface="Calibri"/>
+        <a:ea typeface=""/>
+        <a:cs typeface=""/>
+        <a:font script="Jpan" typeface="ＭＳ Ｐゴシック"/>
+        <a:font script="Hang" typeface="맑은 고딕"/>
+        <a:font script="Hans" typeface="宋体"/>
+        <a:font script="Hant" typeface="新細明體"/>
+        <a:font script="Arab" typeface="Arial"/>
+        <a:font script="Hebr" typeface="Arial"/>
+        <a:font script="Thai" typeface="Cordia New"/>
+        <a:font script="Ethi" typeface="Nyala"/>
+        <a:font script="Beng" typeface="Vrinda"/>
+        <a:font script="Gujr" typeface="Shruti"/>
+        <a:font script="Khmr" typeface="DaunPenh"/>
+        <a:font script="Knda" typeface="Tunga"/>
+        <a:font script="Guru" typeface="Raavi"/>
+        <a:font script="Cans" typeface="Euphemia"/>
+        <a:font script="Cher" typeface="Plantagenet Cherokee"/>
+        <a:font script="Yiii" typeface="Microsoft Yi Baiti"/>
+        <a:font script="Tibt" typeface="Microsoft Himalaya"/>
+        <a:font script="Thaa" typeface="MV Boli"/>
+        <a:font script="Deva" typeface="Mangal"/>
+        <a:font script="Telu" typeface="Gautami"/>
+        <a:font script="Taml" typeface="Latha"/>
+        <a:font script="Syrc" typeface="Estrangelo Edessa"/>
+        <a:font script="Orya" typeface="Kalinga"/>
+        <a:font script="Mlym" typeface="Kartika"/>
+        <a:font script="Laoo" typeface="DokChampa"/>
+        <a:font script="Sinh" typeface="Iskoola Pota"/>
+        <a:font script="Mong" typeface="Mongolian Baiti"/>
+        <a:font script="Viet" typeface="Arial"/>
+        <a:font script="Uigh" typeface="Microsoft Uighur"/>
+        <a:font script="Geor" typeface="Sylfaen"/>
+      </a:minorFont>
+    </a:fontScheme>
+    <a:fmtScheme name="Office">
+      <a:fillStyleLst>
+        <a:solidFill>
+          <a:schemeClr val="phClr"/>
+        </a:solidFill>
+        <a:gradFill rotWithShape="1">
+          <a:gsLst>
+            <a:gs pos="0">
+              <a:schemeClr val="phClr">
+                <a:tint val="50000"/>
+                <a:satMod val="300000"/>
+              </a:schemeClr>
+            </a:gs>
+            <a:gs pos="35000">
+              <a:schemeClr val="phClr">
+                <a:tint val="37000"/>
+                <a:satMod val="300000"/>
+              </a:schemeClr>
+            </a:gs>
+            <a:gs pos="100000">
+              <a:schemeClr val="phClr">
+                <a:tint val="15000"/>
+                <a:satMod val="350000"/>
+              </a:schemeClr>
+            </a:gs>
+          </a:gsLst>
+          <a:lin ang="16200000" scaled="1"/>
+        </a:gradFill>
+        <a:gradFill rotWithShape="1">
+          <a:gsLst>
+            <a:gs pos="0">
+              <a:schemeClr val="phClr">
+                <a:tint val="100000"/>
+                <a:shade val="100000"/>
+                <a:satMod val="130000"/>
+              </a:schemeClr>
+            </a:gs>
+            <a:gs pos="100000">
+              <a:schemeClr val="phClr">
+                <a:tint val="50000"/>
+                <a:shade val="100000"/>
+                <a:satMod val="350000"/>
+              </a:schemeClr>
+            </a:gs>
+          </a:gsLst>
+          <a:lin ang="16200000" scaled="0"/>
+        </a:gradFill>
+      </a:fillStyleLst>
+      <a:lnStyleLst>
+        <a:ln w="9525" cap="flat" cmpd="sng" algn="ctr">
+          <a:solidFill>
+            <a:schemeClr val="phClr">
+              <a:shade val="95000"/>
+              <a:satMod val="105000"/>
+            </a:schemeClr>
+          </a:solidFill>
+          <a:prstDash val="solid"/>
+        </a:ln>
+        <a:ln w="25400" cap="flat" cmpd="sng" algn="ctr">
+          <a:solidFill>
+            <a:schemeClr val="phClr"/>
+          </a:solidFill>
+          <a:prstDash val="solid"/>
+        </a:ln>
+        <a:ln w="38100" cap="flat" cmpd="sng" algn="ctr">
+          <a:solidFill>
+            <a:schemeClr val="phClr"/>
+          </a:solidFill>
+          <a:prstDash val="solid"/>
+        </a:ln>
+      </a:lnStyleLst>
+      <a:effectStyleLst>
+        <a:effectStyle>
+          <a:effectLst>
+            <a:outerShdw blurRad="40000" dist="20000" dir="5400000" rotWithShape="0">
+              <a:srgbClr val="000000">
+                <a:alpha val="38000"/>
+              </a:srgbClr>
+            </a:outerShdw>
+          </a:effectLst>
+        </a:effectStyle>
+        <a:effectStyle>
+          <a:effectLst>
+            <a:outerShdw blurRad="40000" dist="23000" dir="5400000" rotWithShape="0">
+              <a:srgbClr val="000000">
+                <a:alpha val="35000"/>
+              </a:srgbClr>
+            </a:outerShdw>
+          </a:effectLst>
+        </a:effectStyle>
+        <a:effectStyle>
+          <a:effectLst>
+            <a:outerShdw blurRad="40000" dist="23000" dir="5400000" rotWithShape="0">
+              <a:srgbClr val="000000">
+                <a:alpha val="35000"/>
+              </a:srgbClr>
+            </a:outerShdw>
+          </a:effectLst>
+          <a:scene3d>
+            <a:camera prst="orthographicFront">
+              <a:rot lat="0" lon="0" rev="0"/>
+            </a:camera>
+            <a:lightRig rig="threePt" dir="t">
+              <a:rot lat="0" lon="0" rev="1200000"/>
+            </a:lightRig>
+          </a:scene3d>
+          <a:sp3d>
+            <a:bevelT w="63500" h="25400"/>
+          </a:sp3d>
+        </a:effectStyle>
+      </a:effectStyleLst>
+      <a:bgFillStyleLst>
+        <a:solidFill>
+          <a:schemeClr val="phClr"/>
+        </a:solidFill>
+        <a:gradFill rotWithShape="1">
+          <a:gsLst>
+            <a:gs pos="0">
+              <a:schemeClr val="phClr">
+                <a:tint val="40000"/>
+                <a:satMod val="350000"/>
+              </a:schemeClr>
+            </a:gs>
+            <a:gs pos="40000">
+              <a:schemeClr val="phClr">
+                <a:tint val="45000"/>
+                <a:shade val="99000"/>
+                <a:satMod val="350000"/>
+              </a:schemeClr>
+            </a:gs>
+            <a:gs pos="100000">
+              <a:schemeClr val="phClr">
+                <a:shade val="20000"/>
+                <a:satMod val="255000"/>
+              </a:schemeClr>
+            </a:gs>
+          </a:gsLst>
+          <a:path path="circle">
+            <a:fillToRect l="50000" t="-80000" r="50000" b="180000"/>
+          </a:path>
+        </a:gradFill>
+        <a:gradFill rotWithShape="1">
+          <a:gsLst>
+            <a:gs pos="0">
+              <a:schemeClr val="phClr">
+                <a:tint val="80000"/>
+                <a:satMod val="300000"/>
+              </a:schemeClr>
+            </a:gs>
+            <a:gs pos="100000">
+              <a:schemeClr val="phClr">
+                <a:shade val="30000"/>
+                <a:satMod val="200000"/>
+              </a:schemeClr>
+            </a:gs>
+          </a:gsLst>
+          <a:path path="circle">
+            <a:fillToRect l="50000" t="50000" r="50000" b="50000"/>
+          </a:path>
+        </a:gradFill>
+      </a:bgFillStyleLst>
+    </a:fmtScheme>
+  </a:themeElements>
+  <a:objectDefaults>
+    <a:spDef>
+      <a:spPr/>
+      <a:bodyPr/>
+      <a:lstStyle/>
+      <a:style>
+        <a:lnRef idx="1">
+          <a:schemeClr val="accent1"/>
+        </a:lnRef>
+        <a:fillRef idx="3">
+          <a:schemeClr val="accent1"/>
+        </a:fillRef>
+        <a:effectRef idx="2">
+          <a:schemeClr val="accent1"/>
+        </a:effectRef>
+        <a:fontRef idx="minor">
+          <a:schemeClr val="lt1"/>
+        </a:fontRef>
+      </a:style>
+    </a:spDef>
+    <a:lnDef>
+      <a:spPr/>
+      <a:bodyPr/>
+      <a:lstStyle/>
+      <a:style>
+        <a:lnRef idx="2">
+          <a:schemeClr val="accent1"/>
+        </a:lnRef>
+        <a:fillRef idx="0">
+          <a:schemeClr val="accent1"/>
+        </a:fillRef>
+        <a:effectRef idx="1">
+          <a:schemeClr val="accent1"/>
+        </a:effectRef>
+        <a:fontRef idx="minor">
+          <a:schemeClr val="tx1"/>
+        </a:fontRef>
+      </a:style>
+    </a:lnDef>
+  </a:objectDefaults>
+  <a:extraClrSchemeLst/>
+</a:theme>
 </file>